--- a/GISMA_Chess_Challenge.pptx
+++ b/GISMA_Chess_Challenge.pptx
@@ -1602,7 +1602,7 @@
                 <a:ea typeface="Calibri" pitchFamily="34" charset="-122"/>
                 <a:cs typeface="Calibri" pitchFamily="34" charset="-120"/>
               </a:rPr>
-              <a:t>Team Name  ·  </a:t>
+              <a:t>Name  ·  </a:t>
             </a:r>
           </a:p>
           <a:p>
@@ -1620,40 +1620,6 @@
                 <a:cs typeface="Calibri" pitchFamily="34" charset="-120"/>
               </a:rPr>
               <a:t>KARAN LODHA</a:t>
-            </a:r>
-          </a:p>
-          <a:p>
-            <a:pPr marL="171450" indent="-171450">
-              <a:buFont typeface="Arial" panose="020B0604020202020204" pitchFamily="34" charset="0"/>
-              <a:buChar char="•"/>
-            </a:pPr>
-            <a:r>
-              <a:rPr lang="en-US" sz="1200" dirty="0">
-                <a:solidFill>
-                  <a:srgbClr val="B9D9C6"/>
-                </a:solidFill>
-                <a:latin typeface="Calibri" pitchFamily="34" charset="0"/>
-                <a:ea typeface="Calibri" pitchFamily="34" charset="-122"/>
-                <a:cs typeface="Calibri" pitchFamily="34" charset="-120"/>
-              </a:rPr>
-              <a:t>MOHAMMED  NAIEF ABDUL KAREEM </a:t>
-            </a:r>
-          </a:p>
-          <a:p>
-            <a:pPr marL="171450" indent="-171450">
-              <a:buFont typeface="Arial" panose="020B0604020202020204" pitchFamily="34" charset="0"/>
-              <a:buChar char="•"/>
-            </a:pPr>
-            <a:r>
-              <a:rPr lang="en-US" sz="1200" dirty="0">
-                <a:solidFill>
-                  <a:srgbClr val="B9D9C6"/>
-                </a:solidFill>
-                <a:latin typeface="Calibri" pitchFamily="34" charset="0"/>
-                <a:ea typeface="Calibri" pitchFamily="34" charset="-122"/>
-                <a:cs typeface="Calibri" pitchFamily="34" charset="-120"/>
-              </a:rPr>
-              <a:t>ROSEMARRIE EXILE</a:t>
             </a:r>
           </a:p>
           <a:p>
